--- a/docs/examples/layout-gallery-meridian.pptx
+++ b/docs/examples/layout-gallery-meridian.pptx
@@ -252,7 +252,11 @@
             </c:dLbl>
             <c:dLbl>
               <c:idx val="2"/>
-              <c:spPr/>
+              <c:spPr>
+                <a:solidFill>
+                  <a:srgbClr val="FBF9F5"/>
+                </a:solidFill>
+              </c:spPr>
               <c:txPr>
                 <a:bodyPr/>
                 <a:lstStyle/>
@@ -260,7 +264,7 @@
                   <a:pPr>
                     <a:defRPr sz="1200" b="1">
                       <a:solidFill>
-                        <a:srgbClr val="9C4221"/>
+                        <a:srgbClr val="1C1915"/>
                       </a:solidFill>
                       <a:latin typeface="Calibri"/>
                     </a:defRPr>
@@ -1250,7 +1254,7 @@
           <a:lstStyle/>
           <a:p>
             <a:r>
-              <a:t>f5 · Weighted monthly churn by segment · churn_by_segment · main.cs.churn_monthly · statement duckdb-08de89a37eb8 · queried 2026-10-18 07:47 UTC</a:t>
+              <a:t>f5 · Weighted monthly churn by segment · churn_by_segment · main.cs.churn_monthly · statement duckdb-dc332e86f5f6 · queried 2026-10-18 08:06 UTC</a:t>
             </a:r>
           </a:p>
           <a:p>
@@ -1410,27 +1414,27 @@
           <a:lstStyle/>
           <a:p>
             <a:r>
-              <a:t>f1 · Monthly churn (weighted) · churn_rate_quarter · main.cs.churn_monthly · statement duckdb-78e337f4c5c5 · queried 2026-10-18 07:47 UTC</a:t>
-            </a:r>
-          </a:p>
-          <a:p>
-            <a:r>
-              <a:t>f2 · Monthly NRR (weighted) · nrr_quarter · main.cs.revenue_monthly · statement duckdb-2938fb8825c7 · queried 2026-10-18 07:47 UTC</a:t>
-            </a:r>
-          </a:p>
-          <a:p>
-            <a:r>
-              <a:t>f3 · Active subscriptions · active_subscriptions · main.cs.churn_monthly · statement duckdb-a55fc3485a29 · queried 2026-10-18 07:47 UTC</a:t>
-            </a:r>
-          </a:p>
-          <a:p>
-            <a:r>
-              <a:t>f4 · Monthly churn · churn_trend_monthly · main.cs.churn_monthly · statement duckdb-d382d6a384b4 · queried 2026-10-18 07:47 UTC</a:t>
-            </a:r>
-          </a:p>
-          <a:p>
-            <a:r>
-              <a:t>f5 · Weighted monthly churn by segment · churn_by_segment · main.cs.churn_monthly · statement duckdb-08de89a37eb8 · queried 2026-10-18 07:47 UTC</a:t>
+              <a:t>f1 · Monthly churn (weighted) · churn_rate_quarter · main.cs.churn_monthly · statement duckdb-fbb4d6cbdd1b · queried 2026-10-18 08:06 UTC</a:t>
+            </a:r>
+          </a:p>
+          <a:p>
+            <a:r>
+              <a:t>f2 · Monthly NRR (weighted) · nrr_quarter · main.cs.revenue_monthly · statement duckdb-e874505da9b8 · queried 2026-10-18 08:06 UTC</a:t>
+            </a:r>
+          </a:p>
+          <a:p>
+            <a:r>
+              <a:t>f3 · Active subscriptions · active_subscriptions · main.cs.churn_monthly · statement duckdb-056746ee75b6 · queried 2026-10-18 08:06 UTC</a:t>
+            </a:r>
+          </a:p>
+          <a:p>
+            <a:r>
+              <a:t>f4 · Monthly churn · churn_trend_monthly · main.cs.churn_monthly · statement duckdb-00c20b5072eb · queried 2026-10-18 08:06 UTC</a:t>
+            </a:r>
+          </a:p>
+          <a:p>
+            <a:r>
+              <a:t>f5 · Weighted monthly churn by segment · churn_by_segment · main.cs.churn_monthly · statement duckdb-dc332e86f5f6 · queried 2026-10-18 08:06 UTC</a:t>
             </a:r>
           </a:p>
           <a:p>
@@ -1670,22 +1674,22 @@
           <a:lstStyle/>
           <a:p>
             <a:r>
-              <a:t>f1 · Monthly churn (weighted) · churn_rate_quarter · main.cs.churn_monthly · statement duckdb-78e337f4c5c5 · queried 2026-10-18 07:47 UTC</a:t>
-            </a:r>
-          </a:p>
-          <a:p>
-            <a:r>
-              <a:t>f2 · Monthly NRR (weighted) · nrr_quarter · main.cs.revenue_monthly · statement duckdb-2938fb8825c7 · queried 2026-10-18 07:47 UTC</a:t>
-            </a:r>
-          </a:p>
-          <a:p>
-            <a:r>
-              <a:t>f3 · Active subscriptions · active_subscriptions · main.cs.churn_monthly · statement duckdb-a55fc3485a29 · queried 2026-10-18 07:47 UTC</a:t>
-            </a:r>
-          </a:p>
-          <a:p>
-            <a:r>
-              <a:t>f4 · Monthly churn · churn_trend_monthly · main.cs.churn_monthly · statement duckdb-d382d6a384b4 · queried 2026-10-18 07:47 UTC</a:t>
+              <a:t>f1 · Monthly churn (weighted) · churn_rate_quarter · main.cs.churn_monthly · statement duckdb-fbb4d6cbdd1b · queried 2026-10-18 08:06 UTC</a:t>
+            </a:r>
+          </a:p>
+          <a:p>
+            <a:r>
+              <a:t>f2 · Monthly NRR (weighted) · nrr_quarter · main.cs.revenue_monthly · statement duckdb-e874505da9b8 · queried 2026-10-18 08:06 UTC</a:t>
+            </a:r>
+          </a:p>
+          <a:p>
+            <a:r>
+              <a:t>f3 · Active subscriptions · active_subscriptions · main.cs.churn_monthly · statement duckdb-056746ee75b6 · queried 2026-10-18 08:06 UTC</a:t>
+            </a:r>
+          </a:p>
+          <a:p>
+            <a:r>
+              <a:t>f4 · Monthly churn · churn_trend_monthly · main.cs.churn_monthly · statement duckdb-00c20b5072eb · queried 2026-10-18 08:06 UTC</a:t>
             </a:r>
           </a:p>
           <a:p>
@@ -1835,7 +1839,7 @@
           <a:lstStyle/>
           <a:p>
             <a:r>
-              <a:t>f4 · Monthly churn · churn_trend_monthly · main.cs.churn_monthly · statement duckdb-d382d6a384b4 · queried 2026-10-18 07:47 UTC</a:t>
+              <a:t>f4 · Monthly churn · churn_trend_monthly · main.cs.churn_monthly · statement duckdb-00c20b5072eb · queried 2026-10-18 08:06 UTC</a:t>
             </a:r>
           </a:p>
           <a:p>
@@ -1925,7 +1929,7 @@
           <a:lstStyle/>
           <a:p>
             <a:r>
-              <a:t>f5 · Weighted monthly churn by segment · churn_by_segment · main.cs.churn_monthly · statement duckdb-08de89a37eb8 · queried 2026-10-18 07:47 UTC</a:t>
+              <a:t>f5 · Weighted monthly churn by segment · churn_by_segment · main.cs.churn_monthly · statement duckdb-dc332e86f5f6 · queried 2026-10-18 08:06 UTC</a:t>
             </a:r>
           </a:p>
           <a:p>
@@ -5897,8 +5901,8 @@
         </p:nvSpPr>
         <p:spPr>
           <a:xfrm>
-            <a:off x="566928" y="1463040"/>
-            <a:ext cx="5611368" cy="4882896"/>
+            <a:off x="566928" y="2967228"/>
+            <a:ext cx="5611368" cy="1874520"/>
           </a:xfrm>
           <a:prstGeom prst="roundRect">
             <a:avLst>
@@ -5942,8 +5946,8 @@
         </p:nvSpPr>
         <p:spPr>
           <a:xfrm>
-            <a:off x="566928" y="1463040"/>
-            <a:ext cx="5611368" cy="640080"/>
+            <a:off x="566928" y="2967228"/>
+            <a:ext cx="5611368" cy="502920"/>
           </a:xfrm>
           <a:prstGeom prst="rect">
             <a:avLst/>
@@ -5985,8 +5989,8 @@
         </p:nvSpPr>
         <p:spPr>
           <a:xfrm>
-            <a:off x="749808" y="1463040"/>
-            <a:ext cx="5245608" cy="640080"/>
+            <a:off x="749808" y="2967228"/>
+            <a:ext cx="5245608" cy="502920"/>
           </a:xfrm>
           <a:prstGeom prst="rect">
             <a:avLst/>
@@ -6028,7 +6032,7 @@
         </p:nvSpPr>
         <p:spPr>
           <a:xfrm>
-            <a:off x="749808" y="3136392"/>
+            <a:off x="749808" y="3785616"/>
             <a:ext cx="54864" cy="54864"/>
           </a:xfrm>
           <a:prstGeom prst="ellipse">
@@ -6071,8 +6075,8 @@
         </p:nvSpPr>
         <p:spPr>
           <a:xfrm>
-            <a:off x="886968" y="2103120"/>
-            <a:ext cx="5154168" cy="2121408"/>
+            <a:off x="886968" y="3470148"/>
+            <a:ext cx="5154168" cy="685800"/>
           </a:xfrm>
           <a:prstGeom prst="rect">
             <a:avLst/>
@@ -6114,7 +6118,7 @@
         </p:nvSpPr>
         <p:spPr>
           <a:xfrm>
-            <a:off x="749808" y="5257800"/>
+            <a:off x="749808" y="4471416"/>
             <a:ext cx="54864" cy="54864"/>
           </a:xfrm>
           <a:prstGeom prst="ellipse">
@@ -6157,8 +6161,8 @@
         </p:nvSpPr>
         <p:spPr>
           <a:xfrm>
-            <a:off x="886968" y="4224528"/>
-            <a:ext cx="5154168" cy="2121408"/>
+            <a:off x="886968" y="4155948"/>
+            <a:ext cx="5154168" cy="685800"/>
           </a:xfrm>
           <a:prstGeom prst="rect">
             <a:avLst/>
@@ -6200,8 +6204,8 @@
         </p:nvSpPr>
         <p:spPr>
           <a:xfrm>
-            <a:off x="6178296" y="1463040"/>
-            <a:ext cx="5446776" cy="4882896"/>
+            <a:off x="6178296" y="2967228"/>
+            <a:ext cx="5446776" cy="1874520"/>
           </a:xfrm>
           <a:prstGeom prst="roundRect">
             <a:avLst>
@@ -6245,8 +6249,8 @@
         </p:nvSpPr>
         <p:spPr>
           <a:xfrm>
-            <a:off x="6178296" y="1463040"/>
-            <a:ext cx="5446776" cy="640080"/>
+            <a:off x="6178296" y="2967228"/>
+            <a:ext cx="5446776" cy="502920"/>
           </a:xfrm>
           <a:prstGeom prst="rect">
             <a:avLst/>
@@ -6288,8 +6292,8 @@
         </p:nvSpPr>
         <p:spPr>
           <a:xfrm>
-            <a:off x="6361176" y="1463040"/>
-            <a:ext cx="5081016" cy="640080"/>
+            <a:off x="6361176" y="2967228"/>
+            <a:ext cx="5081016" cy="502920"/>
           </a:xfrm>
           <a:prstGeom prst="rect">
             <a:avLst/>
@@ -6331,7 +6335,7 @@
         </p:nvSpPr>
         <p:spPr>
           <a:xfrm>
-            <a:off x="6361176" y="3136392"/>
+            <a:off x="6361176" y="3785616"/>
             <a:ext cx="54864" cy="54864"/>
           </a:xfrm>
           <a:prstGeom prst="ellipse">
@@ -6374,8 +6378,8 @@
         </p:nvSpPr>
         <p:spPr>
           <a:xfrm>
-            <a:off x="6498336" y="2103120"/>
-            <a:ext cx="4989576" cy="2121408"/>
+            <a:off x="6498336" y="3470148"/>
+            <a:ext cx="4989576" cy="685800"/>
           </a:xfrm>
           <a:prstGeom prst="rect">
             <a:avLst/>
@@ -6417,7 +6421,7 @@
         </p:nvSpPr>
         <p:spPr>
           <a:xfrm>
-            <a:off x="6361176" y="5257800"/>
+            <a:off x="6361176" y="4471416"/>
             <a:ext cx="54864" cy="54864"/>
           </a:xfrm>
           <a:prstGeom prst="ellipse">
@@ -6460,8 +6464,8 @@
         </p:nvSpPr>
         <p:spPr>
           <a:xfrm>
-            <a:off x="6498336" y="4224528"/>
-            <a:ext cx="4989576" cy="2121408"/>
+            <a:off x="6498336" y="4155948"/>
+            <a:ext cx="4989576" cy="685800"/>
           </a:xfrm>
           <a:prstGeom prst="rect">
             <a:avLst/>
@@ -7415,8 +7419,8 @@
         </p:nvSpPr>
         <p:spPr>
           <a:xfrm>
-            <a:off x="566928" y="1463040"/>
-            <a:ext cx="3740912" cy="4882896"/>
+            <a:off x="566928" y="2852928"/>
+            <a:ext cx="3740912" cy="2103120"/>
           </a:xfrm>
           <a:prstGeom prst="roundRect">
             <a:avLst>
@@ -7460,8 +7464,8 @@
         </p:nvSpPr>
         <p:spPr>
           <a:xfrm>
-            <a:off x="566928" y="1463040"/>
-            <a:ext cx="3740912" cy="54864"/>
+            <a:off x="566928" y="2852928"/>
+            <a:ext cx="3740912" cy="45720"/>
           </a:xfrm>
           <a:prstGeom prst="rect">
             <a:avLst/>
@@ -7503,8 +7507,8 @@
         </p:nvSpPr>
         <p:spPr>
           <a:xfrm>
-            <a:off x="749808" y="1691640"/>
-            <a:ext cx="3375152" cy="1097280"/>
+            <a:off x="749808" y="2990088"/>
+            <a:ext cx="3375152" cy="822960"/>
           </a:xfrm>
           <a:prstGeom prst="rect">
             <a:avLst/>
@@ -7527,7 +7531,7 @@
               </a:spcAft>
             </a:pPr>
             <a:r>
-              <a:rPr sz="4400" b="1">
+              <a:rPr sz="4000" b="1">
                 <a:solidFill>
                   <a:srgbClr val="9C4221"/>
                 </a:solidFill>
@@ -7546,7 +7550,7 @@
         </p:nvSpPr>
         <p:spPr>
           <a:xfrm>
-            <a:off x="749808" y="2834640"/>
+            <a:off x="749808" y="3904488"/>
             <a:ext cx="457200" cy="27432"/>
           </a:xfrm>
           <a:prstGeom prst="rect">
@@ -7589,8 +7593,8 @@
         </p:nvSpPr>
         <p:spPr>
           <a:xfrm>
-            <a:off x="749808" y="3017520"/>
-            <a:ext cx="3375152" cy="3054096"/>
+            <a:off x="749808" y="3995928"/>
+            <a:ext cx="3375152" cy="822960"/>
           </a:xfrm>
           <a:prstGeom prst="rect">
             <a:avLst/>
@@ -7613,13 +7617,13 @@
               </a:spcAft>
             </a:pPr>
             <a:r>
-              <a:rPr sz="2200" b="0">
+              <a:rPr sz="2000" b="0">
                 <a:solidFill>
                   <a:srgbClr val="1C1915"/>
                 </a:solidFill>
                 <a:latin typeface="Calibri"/>
               </a:rPr>
-              <a:t>The headline figures</a:t>
+              <a:t>The headline figures frame</a:t>
             </a:r>
           </a:p>
           <a:p>
@@ -7635,13 +7639,13 @@
               </a:spcAft>
             </a:pPr>
             <a:r>
-              <a:rPr sz="2200" b="0">
+              <a:rPr sz="2000" b="0">
                 <a:solidFill>
                   <a:srgbClr val="1C1915"/>
                 </a:solidFill>
                 <a:latin typeface="Calibri"/>
               </a:rPr>
-              <a:t>frame the review</a:t>
+              <a:t>the review</a:t>
             </a:r>
           </a:p>
         </p:txBody>
@@ -7654,8 +7658,8 @@
         </p:nvSpPr>
         <p:spPr>
           <a:xfrm>
-            <a:off x="4307840" y="1463040"/>
-            <a:ext cx="3740912" cy="4882896"/>
+            <a:off x="4307840" y="2852928"/>
+            <a:ext cx="3740912" cy="2103120"/>
           </a:xfrm>
           <a:prstGeom prst="roundRect">
             <a:avLst>
@@ -7699,8 +7703,8 @@
         </p:nvSpPr>
         <p:spPr>
           <a:xfrm>
-            <a:off x="4307840" y="1463040"/>
-            <a:ext cx="3740912" cy="54864"/>
+            <a:off x="4307840" y="2852928"/>
+            <a:ext cx="3740912" cy="45720"/>
           </a:xfrm>
           <a:prstGeom prst="rect">
             <a:avLst/>
@@ -7742,8 +7746,8 @@
         </p:nvSpPr>
         <p:spPr>
           <a:xfrm>
-            <a:off x="4490720" y="1691640"/>
-            <a:ext cx="3375152" cy="1097280"/>
+            <a:off x="4490720" y="2990088"/>
+            <a:ext cx="3375152" cy="822960"/>
           </a:xfrm>
           <a:prstGeom prst="rect">
             <a:avLst/>
@@ -7766,7 +7770,7 @@
               </a:spcAft>
             </a:pPr>
             <a:r>
-              <a:rPr sz="4400" b="1">
+              <a:rPr sz="4000" b="1">
                 <a:solidFill>
                   <a:srgbClr val="9C4221"/>
                 </a:solidFill>
@@ -7785,7 +7789,7 @@
         </p:nvSpPr>
         <p:spPr>
           <a:xfrm>
-            <a:off x="4490720" y="2834640"/>
+            <a:off x="4490720" y="3904488"/>
             <a:ext cx="457200" cy="27432"/>
           </a:xfrm>
           <a:prstGeom prst="rect">
@@ -7828,8 +7832,8 @@
         </p:nvSpPr>
         <p:spPr>
           <a:xfrm>
-            <a:off x="4490720" y="3017520"/>
-            <a:ext cx="3375152" cy="3054096"/>
+            <a:off x="4490720" y="3995928"/>
+            <a:ext cx="3375152" cy="822960"/>
           </a:xfrm>
           <a:prstGeom prst="rect">
             <a:avLst/>
@@ -7852,13 +7856,13 @@
               </a:spcAft>
             </a:pPr>
             <a:r>
-              <a:rPr sz="2200" b="0">
+              <a:rPr sz="2000" b="0">
                 <a:solidFill>
                   <a:srgbClr val="1C1915"/>
                 </a:solidFill>
                 <a:latin typeface="Calibri"/>
               </a:rPr>
-              <a:t>The monthly path shows</a:t>
+              <a:t>The monthly path shows the</a:t>
             </a:r>
           </a:p>
           <a:p>
@@ -7874,13 +7878,13 @@
               </a:spcAft>
             </a:pPr>
             <a:r>
-              <a:rPr sz="2200" b="0">
+              <a:rPr sz="2000" b="0">
                 <a:solidFill>
                   <a:srgbClr val="1C1915"/>
                 </a:solidFill>
                 <a:latin typeface="Calibri"/>
               </a:rPr>
-              <a:t>the direction</a:t>
+              <a:t>direction</a:t>
             </a:r>
           </a:p>
         </p:txBody>
@@ -7893,8 +7897,8 @@
         </p:nvSpPr>
         <p:spPr>
           <a:xfrm>
-            <a:off x="8048752" y="1463040"/>
-            <a:ext cx="3576320" cy="4882896"/>
+            <a:off x="8048752" y="2852928"/>
+            <a:ext cx="3576320" cy="2103120"/>
           </a:xfrm>
           <a:prstGeom prst="roundRect">
             <a:avLst>
@@ -7938,8 +7942,8 @@
         </p:nvSpPr>
         <p:spPr>
           <a:xfrm>
-            <a:off x="8048752" y="1463040"/>
-            <a:ext cx="3576320" cy="54864"/>
+            <a:off x="8048752" y="2852928"/>
+            <a:ext cx="3576320" cy="45720"/>
           </a:xfrm>
           <a:prstGeom prst="rect">
             <a:avLst/>
@@ -7981,8 +7985,8 @@
         </p:nvSpPr>
         <p:spPr>
           <a:xfrm>
-            <a:off x="8231632" y="1691640"/>
-            <a:ext cx="3210560" cy="1097280"/>
+            <a:off x="8231632" y="2990088"/>
+            <a:ext cx="3210560" cy="822960"/>
           </a:xfrm>
           <a:prstGeom prst="rect">
             <a:avLst/>
@@ -8005,7 +8009,7 @@
               </a:spcAft>
             </a:pPr>
             <a:r>
-              <a:rPr sz="4400" b="1">
+              <a:rPr sz="4000" b="1">
                 <a:solidFill>
                   <a:srgbClr val="9C4221"/>
                 </a:solidFill>
@@ -8024,7 +8028,7 @@
         </p:nvSpPr>
         <p:spPr>
           <a:xfrm>
-            <a:off x="8231632" y="2834640"/>
+            <a:off x="8231632" y="3904488"/>
             <a:ext cx="457200" cy="27432"/>
           </a:xfrm>
           <a:prstGeom prst="rect">
@@ -8067,8 +8071,8 @@
         </p:nvSpPr>
         <p:spPr>
           <a:xfrm>
-            <a:off x="8231632" y="3017520"/>
-            <a:ext cx="3210560" cy="3054096"/>
+            <a:off x="8231632" y="3995928"/>
+            <a:ext cx="3210560" cy="822960"/>
           </a:xfrm>
           <a:prstGeom prst="rect">
             <a:avLst/>
@@ -8091,13 +8095,13 @@
               </a:spcAft>
             </a:pPr>
             <a:r>
-              <a:rPr sz="2200" b="0">
+              <a:rPr sz="2000" b="0">
                 <a:solidFill>
                   <a:srgbClr val="1C1915"/>
                 </a:solidFill>
                 <a:latin typeface="Calibri"/>
               </a:rPr>
-              <a:t>The segment split</a:t>
+              <a:t>The segment split shows</a:t>
             </a:r>
           </a:p>
           <a:p>
@@ -8113,13 +8117,13 @@
               </a:spcAft>
             </a:pPr>
             <a:r>
-              <a:rPr sz="2200" b="0">
+              <a:rPr sz="2000" b="0">
                 <a:solidFill>
                   <a:srgbClr val="1C1915"/>
                 </a:solidFill>
                 <a:latin typeface="Calibri"/>
               </a:rPr>
-              <a:t>shows where it sits</a:t>
+              <a:t>where it sits</a:t>
             </a:r>
           </a:p>
         </p:txBody>
@@ -11802,8 +11806,8 @@
         </p:nvSpPr>
         <p:spPr>
           <a:xfrm>
-            <a:off x="566928" y="1463040"/>
-            <a:ext cx="5611368" cy="4882896"/>
+            <a:off x="566928" y="2967228"/>
+            <a:ext cx="5611368" cy="1874520"/>
           </a:xfrm>
           <a:prstGeom prst="roundRect">
             <a:avLst>
@@ -11847,8 +11851,8 @@
         </p:nvSpPr>
         <p:spPr>
           <a:xfrm>
-            <a:off x="566928" y="1463040"/>
-            <a:ext cx="5611368" cy="640080"/>
+            <a:off x="566928" y="2967228"/>
+            <a:ext cx="5611368" cy="502920"/>
           </a:xfrm>
           <a:prstGeom prst="rect">
             <a:avLst/>
@@ -11890,8 +11894,8 @@
         </p:nvSpPr>
         <p:spPr>
           <a:xfrm>
-            <a:off x="704088" y="1463040"/>
-            <a:ext cx="640080" cy="640080"/>
+            <a:off x="704088" y="2967228"/>
+            <a:ext cx="640080" cy="502920"/>
           </a:xfrm>
           <a:prstGeom prst="rect">
             <a:avLst/>
@@ -11933,8 +11937,8 @@
         </p:nvSpPr>
         <p:spPr>
           <a:xfrm>
-            <a:off x="1344168" y="1463040"/>
-            <a:ext cx="4651248" cy="640080"/>
+            <a:off x="1344168" y="2967228"/>
+            <a:ext cx="4651248" cy="502920"/>
           </a:xfrm>
           <a:prstGeom prst="rect">
             <a:avLst/>
@@ -11976,7 +11980,7 @@
         </p:nvSpPr>
         <p:spPr>
           <a:xfrm>
-            <a:off x="749808" y="3136392"/>
+            <a:off x="749808" y="3785616"/>
             <a:ext cx="54864" cy="54864"/>
           </a:xfrm>
           <a:prstGeom prst="ellipse">
@@ -12019,8 +12023,8 @@
         </p:nvSpPr>
         <p:spPr>
           <a:xfrm>
-            <a:off x="886968" y="2103120"/>
-            <a:ext cx="5154168" cy="2121408"/>
+            <a:off x="886968" y="3470148"/>
+            <a:ext cx="5154168" cy="685800"/>
           </a:xfrm>
           <a:prstGeom prst="rect">
             <a:avLst/>
@@ -12062,7 +12066,7 @@
         </p:nvSpPr>
         <p:spPr>
           <a:xfrm>
-            <a:off x="749808" y="5257800"/>
+            <a:off x="749808" y="4471416"/>
             <a:ext cx="54864" cy="54864"/>
           </a:xfrm>
           <a:prstGeom prst="ellipse">
@@ -12105,8 +12109,8 @@
         </p:nvSpPr>
         <p:spPr>
           <a:xfrm>
-            <a:off x="886968" y="4224528"/>
-            <a:ext cx="5154168" cy="2121408"/>
+            <a:off x="886968" y="4155948"/>
+            <a:ext cx="5154168" cy="685800"/>
           </a:xfrm>
           <a:prstGeom prst="rect">
             <a:avLst/>
@@ -12148,8 +12152,8 @@
         </p:nvSpPr>
         <p:spPr>
           <a:xfrm>
-            <a:off x="6178296" y="1463040"/>
-            <a:ext cx="5446776" cy="4882896"/>
+            <a:off x="6178296" y="2967228"/>
+            <a:ext cx="5446776" cy="1874520"/>
           </a:xfrm>
           <a:prstGeom prst="roundRect">
             <a:avLst>
@@ -12193,8 +12197,8 @@
         </p:nvSpPr>
         <p:spPr>
           <a:xfrm>
-            <a:off x="6178296" y="1463040"/>
-            <a:ext cx="5446776" cy="640080"/>
+            <a:off x="6178296" y="2967228"/>
+            <a:ext cx="5446776" cy="502920"/>
           </a:xfrm>
           <a:prstGeom prst="rect">
             <a:avLst/>
@@ -12236,8 +12240,8 @@
         </p:nvSpPr>
         <p:spPr>
           <a:xfrm>
-            <a:off x="6315456" y="1463040"/>
-            <a:ext cx="640080" cy="640080"/>
+            <a:off x="6315456" y="2967228"/>
+            <a:ext cx="640080" cy="502920"/>
           </a:xfrm>
           <a:prstGeom prst="rect">
             <a:avLst/>
@@ -12279,8 +12283,8 @@
         </p:nvSpPr>
         <p:spPr>
           <a:xfrm>
-            <a:off x="6955536" y="1463040"/>
-            <a:ext cx="4486656" cy="640080"/>
+            <a:off x="6955536" y="2967228"/>
+            <a:ext cx="4486656" cy="502920"/>
           </a:xfrm>
           <a:prstGeom prst="rect">
             <a:avLst/>
@@ -12322,7 +12326,7 @@
         </p:nvSpPr>
         <p:spPr>
           <a:xfrm>
-            <a:off x="6361176" y="3136392"/>
+            <a:off x="6361176" y="3785616"/>
             <a:ext cx="54864" cy="54864"/>
           </a:xfrm>
           <a:prstGeom prst="ellipse">
@@ -12365,8 +12369,8 @@
         </p:nvSpPr>
         <p:spPr>
           <a:xfrm>
-            <a:off x="6498336" y="2103120"/>
-            <a:ext cx="4989576" cy="2121408"/>
+            <a:off x="6498336" y="3470148"/>
+            <a:ext cx="4989576" cy="685800"/>
           </a:xfrm>
           <a:prstGeom prst="rect">
             <a:avLst/>
@@ -12408,7 +12412,7 @@
         </p:nvSpPr>
         <p:spPr>
           <a:xfrm>
-            <a:off x="6361176" y="5257800"/>
+            <a:off x="6361176" y="4471416"/>
             <a:ext cx="54864" cy="54864"/>
           </a:xfrm>
           <a:prstGeom prst="ellipse">
@@ -12451,8 +12455,8 @@
         </p:nvSpPr>
         <p:spPr>
           <a:xfrm>
-            <a:off x="6498336" y="4224528"/>
-            <a:ext cx="4989576" cy="2121408"/>
+            <a:off x="6498336" y="4155948"/>
+            <a:ext cx="4989576" cy="685800"/>
           </a:xfrm>
           <a:prstGeom prst="rect">
             <a:avLst/>
@@ -12692,7 +12696,7 @@
         </p:nvSpPr>
         <p:spPr>
           <a:xfrm>
-            <a:off x="566928" y="1828800"/>
+            <a:off x="566928" y="3035808"/>
             <a:ext cx="11058144" cy="27432"/>
           </a:xfrm>
           <a:prstGeom prst="rect">
@@ -12735,8 +12739,8 @@
         </p:nvSpPr>
         <p:spPr>
           <a:xfrm>
-            <a:off x="566928" y="1554480"/>
-            <a:ext cx="2641092" cy="4791456"/>
+            <a:off x="566928" y="2807208"/>
+            <a:ext cx="2641092" cy="2194560"/>
           </a:xfrm>
           <a:prstGeom prst="roundRect">
             <a:avLst>
@@ -12780,7 +12784,7 @@
         </p:nvSpPr>
         <p:spPr>
           <a:xfrm>
-            <a:off x="749808" y="1783080"/>
+            <a:off x="749808" y="2990088"/>
             <a:ext cx="137160" cy="137160"/>
           </a:xfrm>
           <a:prstGeom prst="ellipse">
@@ -12823,7 +12827,7 @@
         </p:nvSpPr>
         <p:spPr>
           <a:xfrm>
-            <a:off x="932688" y="1691640"/>
+            <a:off x="932688" y="2944368"/>
             <a:ext cx="2138172" cy="411480"/>
           </a:xfrm>
           <a:prstGeom prst="rect">
@@ -12866,8 +12870,8 @@
         </p:nvSpPr>
         <p:spPr>
           <a:xfrm>
-            <a:off x="726948" y="2194560"/>
-            <a:ext cx="2321052" cy="731520"/>
+            <a:off x="726948" y="3401568"/>
+            <a:ext cx="2321052" cy="548640"/>
           </a:xfrm>
           <a:prstGeom prst="rect">
             <a:avLst/>
@@ -12875,7 +12879,7 @@
           <a:noFill/>
         </p:spPr>
         <p:txBody>
-          <a:bodyPr wrap="square" lIns="0" rIns="0" tIns="0" bIns="0" anchor="t"/>
+          <a:bodyPr wrap="square" lIns="0" rIns="0" tIns="0" bIns="0" anchor="ctr"/>
           <a:lstStyle/>
           <a:p>
             <a:pPr algn="l">
@@ -12909,7 +12913,7 @@
         </p:nvSpPr>
         <p:spPr>
           <a:xfrm>
-            <a:off x="726948" y="4677156"/>
+            <a:off x="726948" y="4041648"/>
             <a:ext cx="365760" cy="27432"/>
           </a:xfrm>
           <a:prstGeom prst="rect">
@@ -12952,8 +12956,8 @@
         </p:nvSpPr>
         <p:spPr>
           <a:xfrm>
-            <a:off x="726948" y="4814316"/>
-            <a:ext cx="2321052" cy="1371600"/>
+            <a:off x="726948" y="4133088"/>
+            <a:ext cx="2321052" cy="685800"/>
           </a:xfrm>
           <a:prstGeom prst="rect">
             <a:avLst/>
@@ -13017,8 +13021,8 @@
         </p:nvSpPr>
         <p:spPr>
           <a:xfrm>
-            <a:off x="3372612" y="1554480"/>
-            <a:ext cx="2641092" cy="4791456"/>
+            <a:off x="3372612" y="2807208"/>
+            <a:ext cx="2641092" cy="2194560"/>
           </a:xfrm>
           <a:prstGeom prst="roundRect">
             <a:avLst>
@@ -13062,7 +13066,7 @@
         </p:nvSpPr>
         <p:spPr>
           <a:xfrm>
-            <a:off x="3555492" y="1783080"/>
+            <a:off x="3555492" y="2990088"/>
             <a:ext cx="137160" cy="137160"/>
           </a:xfrm>
           <a:prstGeom prst="ellipse">
@@ -13105,7 +13109,7 @@
         </p:nvSpPr>
         <p:spPr>
           <a:xfrm>
-            <a:off x="3738372" y="1691640"/>
+            <a:off x="3738372" y="2944368"/>
             <a:ext cx="2138172" cy="411480"/>
           </a:xfrm>
           <a:prstGeom prst="rect">
@@ -13148,8 +13152,8 @@
         </p:nvSpPr>
         <p:spPr>
           <a:xfrm>
-            <a:off x="3532632" y="2194560"/>
-            <a:ext cx="2321052" cy="731520"/>
+            <a:off x="3532632" y="3401568"/>
+            <a:ext cx="2321052" cy="548640"/>
           </a:xfrm>
           <a:prstGeom prst="rect">
             <a:avLst/>
@@ -13157,7 +13161,7 @@
           <a:noFill/>
         </p:spPr>
         <p:txBody>
-          <a:bodyPr wrap="square" lIns="0" rIns="0" tIns="0" bIns="0" anchor="t"/>
+          <a:bodyPr wrap="square" lIns="0" rIns="0" tIns="0" bIns="0" anchor="ctr"/>
           <a:lstStyle/>
           <a:p>
             <a:pPr algn="l">
@@ -13191,7 +13195,7 @@
         </p:nvSpPr>
         <p:spPr>
           <a:xfrm>
-            <a:off x="3532632" y="4677156"/>
+            <a:off x="3532632" y="4041648"/>
             <a:ext cx="365760" cy="27432"/>
           </a:xfrm>
           <a:prstGeom prst="rect">
@@ -13234,8 +13238,8 @@
         </p:nvSpPr>
         <p:spPr>
           <a:xfrm>
-            <a:off x="3532632" y="4814316"/>
-            <a:ext cx="2321052" cy="1371600"/>
+            <a:off x="3532632" y="4133088"/>
+            <a:ext cx="2321052" cy="685800"/>
           </a:xfrm>
           <a:prstGeom prst="rect">
             <a:avLst/>
@@ -13277,8 +13281,8 @@
         </p:nvSpPr>
         <p:spPr>
           <a:xfrm>
-            <a:off x="6178296" y="1554480"/>
-            <a:ext cx="2641092" cy="4791456"/>
+            <a:off x="6178296" y="2807208"/>
+            <a:ext cx="2641092" cy="2194560"/>
           </a:xfrm>
           <a:prstGeom prst="roundRect">
             <a:avLst>
@@ -13322,7 +13326,7 @@
         </p:nvSpPr>
         <p:spPr>
           <a:xfrm>
-            <a:off x="6361176" y="1783080"/>
+            <a:off x="6361176" y="2990088"/>
             <a:ext cx="137160" cy="137160"/>
           </a:xfrm>
           <a:prstGeom prst="ellipse">
@@ -13365,7 +13369,7 @@
         </p:nvSpPr>
         <p:spPr>
           <a:xfrm>
-            <a:off x="6544056" y="1691640"/>
+            <a:off x="6544056" y="2944368"/>
             <a:ext cx="2138172" cy="411480"/>
           </a:xfrm>
           <a:prstGeom prst="rect">
@@ -13408,8 +13412,8 @@
         </p:nvSpPr>
         <p:spPr>
           <a:xfrm>
-            <a:off x="6338316" y="2194560"/>
-            <a:ext cx="2321052" cy="731520"/>
+            <a:off x="6338316" y="3401568"/>
+            <a:ext cx="2321052" cy="548640"/>
           </a:xfrm>
           <a:prstGeom prst="rect">
             <a:avLst/>
@@ -13417,7 +13421,7 @@
           <a:noFill/>
         </p:spPr>
         <p:txBody>
-          <a:bodyPr wrap="square" lIns="0" rIns="0" tIns="0" bIns="0" anchor="t"/>
+          <a:bodyPr wrap="square" lIns="0" rIns="0" tIns="0" bIns="0" anchor="ctr"/>
           <a:lstStyle/>
           <a:p>
             <a:pPr algn="l">
@@ -13451,7 +13455,7 @@
         </p:nvSpPr>
         <p:spPr>
           <a:xfrm>
-            <a:off x="6338316" y="4677156"/>
+            <a:off x="6338316" y="4041648"/>
             <a:ext cx="365760" cy="27432"/>
           </a:xfrm>
           <a:prstGeom prst="rect">
@@ -13494,8 +13498,8 @@
         </p:nvSpPr>
         <p:spPr>
           <a:xfrm>
-            <a:off x="6338316" y="4814316"/>
-            <a:ext cx="2321052" cy="1371600"/>
+            <a:off x="6338316" y="4133088"/>
+            <a:ext cx="2321052" cy="685800"/>
           </a:xfrm>
           <a:prstGeom prst="rect">
             <a:avLst/>
@@ -13537,8 +13541,8 @@
         </p:nvSpPr>
         <p:spPr>
           <a:xfrm>
-            <a:off x="8983980" y="1554480"/>
-            <a:ext cx="2641092" cy="4791456"/>
+            <a:off x="8983980" y="2807208"/>
+            <a:ext cx="2641092" cy="2194560"/>
           </a:xfrm>
           <a:prstGeom prst="roundRect">
             <a:avLst>
@@ -13582,7 +13586,7 @@
         </p:nvSpPr>
         <p:spPr>
           <a:xfrm>
-            <a:off x="9166860" y="1783080"/>
+            <a:off x="9166860" y="2990088"/>
             <a:ext cx="137160" cy="137160"/>
           </a:xfrm>
           <a:prstGeom prst="ellipse">
@@ -13625,7 +13629,7 @@
         </p:nvSpPr>
         <p:spPr>
           <a:xfrm>
-            <a:off x="9349740" y="1691640"/>
+            <a:off x="9349740" y="2944368"/>
             <a:ext cx="2138172" cy="411480"/>
           </a:xfrm>
           <a:prstGeom prst="rect">
@@ -13668,8 +13672,8 @@
         </p:nvSpPr>
         <p:spPr>
           <a:xfrm>
-            <a:off x="9144000" y="2194560"/>
-            <a:ext cx="2321052" cy="731520"/>
+            <a:off x="9144000" y="3401568"/>
+            <a:ext cx="2321052" cy="548640"/>
           </a:xfrm>
           <a:prstGeom prst="rect">
             <a:avLst/>
@@ -13677,7 +13681,7 @@
           <a:noFill/>
         </p:spPr>
         <p:txBody>
-          <a:bodyPr wrap="square" lIns="0" rIns="0" tIns="0" bIns="0" anchor="t"/>
+          <a:bodyPr wrap="square" lIns="0" rIns="0" tIns="0" bIns="0" anchor="ctr"/>
           <a:lstStyle/>
           <a:p>
             <a:pPr algn="l">
@@ -13711,7 +13715,7 @@
         </p:nvSpPr>
         <p:spPr>
           <a:xfrm>
-            <a:off x="9144000" y="4677156"/>
+            <a:off x="9144000" y="4041648"/>
             <a:ext cx="365760" cy="27432"/>
           </a:xfrm>
           <a:prstGeom prst="rect">
@@ -13754,8 +13758,8 @@
         </p:nvSpPr>
         <p:spPr>
           <a:xfrm>
-            <a:off x="9144000" y="4814316"/>
-            <a:ext cx="2321052" cy="1371600"/>
+            <a:off x="9144000" y="4133088"/>
+            <a:ext cx="2321052" cy="685800"/>
           </a:xfrm>
           <a:prstGeom prst="rect">
             <a:avLst/>
